--- a/docs/Hackathon_ppt.pptx
+++ b/docs/Hackathon_ppt.pptx
@@ -210,7 +210,7 @@
           <a:p>
             <a:fld id="{672B467B-D7A7-4613-88E3-AE55E57E29B2}" type="datetimeFigureOut">
               <a:rPr lang="en-IN" smtClean="0"/>
-              <a:t>02-03-2026</a:t>
+              <a:t>10-03-2026</a:t>
             </a:fld>
             <a:endParaRPr lang="en-IN"/>
           </a:p>
@@ -609,7 +609,7 @@
           <a:p>
             <a:fld id="{EDC708A5-E0D8-40CD-B0B7-EFEBECB855AD}" type="datetime1">
               <a:rPr lang="en-IN" smtClean="0"/>
-              <a:t>02-03-2026</a:t>
+              <a:t>10-03-2026</a:t>
             </a:fld>
             <a:endParaRPr lang="en-IN"/>
           </a:p>
@@ -782,7 +782,7 @@
           <a:p>
             <a:fld id="{325841C4-D85E-4BE1-A82C-175CFEF47AD2}" type="datetime1">
               <a:rPr lang="en-IN" smtClean="0"/>
-              <a:t>02-03-2026</a:t>
+              <a:t>10-03-2026</a:t>
             </a:fld>
             <a:endParaRPr lang="en-IN"/>
           </a:p>
@@ -965,7 +965,7 @@
           <a:p>
             <a:fld id="{7642B73F-0C6F-4345-82F0-F90D86C72979}" type="datetime1">
               <a:rPr lang="en-IN" smtClean="0"/>
-              <a:t>02-03-2026</a:t>
+              <a:t>10-03-2026</a:t>
             </a:fld>
             <a:endParaRPr lang="en-IN"/>
           </a:p>
@@ -1138,7 +1138,7 @@
           <a:p>
             <a:fld id="{DABF309E-D4AF-448A-8B10-638456A62D0B}" type="datetime1">
               <a:rPr lang="en-IN" smtClean="0"/>
-              <a:t>02-03-2026</a:t>
+              <a:t>10-03-2026</a:t>
             </a:fld>
             <a:endParaRPr lang="en-IN"/>
           </a:p>
@@ -1385,7 +1385,7 @@
           <a:p>
             <a:fld id="{1D4369E7-7919-423B-B74E-C6A97F265EE4}" type="datetime1">
               <a:rPr lang="en-IN" smtClean="0"/>
-              <a:t>02-03-2026</a:t>
+              <a:t>10-03-2026</a:t>
             </a:fld>
             <a:endParaRPr lang="en-IN"/>
           </a:p>
@@ -1620,7 +1620,7 @@
           <a:p>
             <a:fld id="{745DC62A-3851-4666-BCD3-DEDFD379FEEA}" type="datetime1">
               <a:rPr lang="en-IN" smtClean="0"/>
-              <a:t>02-03-2026</a:t>
+              <a:t>10-03-2026</a:t>
             </a:fld>
             <a:endParaRPr lang="en-IN"/>
           </a:p>
@@ -1990,7 +1990,7 @@
           <a:p>
             <a:fld id="{176E9FFA-E053-460F-ABE2-37F68A0BD9C1}" type="datetime1">
               <a:rPr lang="en-IN" smtClean="0"/>
-              <a:t>02-03-2026</a:t>
+              <a:t>10-03-2026</a:t>
             </a:fld>
             <a:endParaRPr lang="en-IN"/>
           </a:p>
@@ -2111,7 +2111,7 @@
           <a:p>
             <a:fld id="{CE208EEA-F4AE-42FB-A010-59E407FB9628}" type="datetime1">
               <a:rPr lang="en-IN" smtClean="0"/>
-              <a:t>02-03-2026</a:t>
+              <a:t>10-03-2026</a:t>
             </a:fld>
             <a:endParaRPr lang="en-IN"/>
           </a:p>
@@ -2209,7 +2209,7 @@
           <a:p>
             <a:fld id="{F5B5330F-01BC-4D02-8A24-F52ACB8B2923}" type="datetime1">
               <a:rPr lang="en-IN" smtClean="0"/>
-              <a:t>02-03-2026</a:t>
+              <a:t>10-03-2026</a:t>
             </a:fld>
             <a:endParaRPr lang="en-IN"/>
           </a:p>
@@ -2489,7 +2489,7 @@
           <a:p>
             <a:fld id="{687578FA-8223-4A54-BC99-B7325C7272B0}" type="datetime1">
               <a:rPr lang="en-IN" smtClean="0"/>
-              <a:t>02-03-2026</a:t>
+              <a:t>10-03-2026</a:t>
             </a:fld>
             <a:endParaRPr lang="en-IN"/>
           </a:p>
@@ -2749,7 +2749,7 @@
           <a:p>
             <a:fld id="{64C13F47-14CA-412A-813B-78155E6D2EA9}" type="datetime1">
               <a:rPr lang="en-IN" smtClean="0"/>
-              <a:t>02-03-2026</a:t>
+              <a:t>10-03-2026</a:t>
             </a:fld>
             <a:endParaRPr lang="en-IN"/>
           </a:p>
@@ -2974,7 +2974,7 @@
           <a:p>
             <a:fld id="{3ECD4A21-5BC3-4871-86CD-898F353D67AF}" type="datetime1">
               <a:rPr lang="en-IN" smtClean="0"/>
-              <a:t>02-03-2026</a:t>
+              <a:t>10-03-2026</a:t>
             </a:fld>
             <a:endParaRPr lang="en-IN"/>
           </a:p>
@@ -3893,7 +3893,7 @@
             </a:r>
             <a:r>
               <a:rPr lang="en-US" sz="1700" b="1" dirty="0"/>
-              <a:t>(mAP50 = 0.81)</a:t>
+              <a:t>(mAP50 = 0.81),(Precision:0.84)</a:t>
             </a:r>
           </a:p>
           <a:p>
@@ -4939,10 +4939,9 @@
                 <a:buChar char="•"/>
               </a:pPr>
               <a:r>
-                <a:rPr lang="en-US" sz="1600" b="1" dirty="0" err="1"/>
+                <a:rPr lang="en-US" sz="1600" b="1" dirty="0"/>
                 <a:t>Numpy</a:t>
               </a:r>
-              <a:endParaRPr lang="en-US" sz="1600" b="1" dirty="0"/>
             </a:p>
             <a:p>
               <a:pPr marL="285750" indent="-285750">
@@ -4950,10 +4949,9 @@
                 <a:buChar char="•"/>
               </a:pPr>
               <a:r>
-                <a:rPr lang="en-US" sz="1600" b="1" dirty="0" err="1"/>
+                <a:rPr lang="en-US" sz="1600" b="1" dirty="0"/>
                 <a:t>SQLAlchemy</a:t>
               </a:r>
-              <a:endParaRPr lang="en-US" sz="1600" b="1" dirty="0"/>
             </a:p>
             <a:p>
               <a:pPr marL="285750" indent="-285750">
@@ -4961,10 +4959,9 @@
                 <a:buChar char="•"/>
               </a:pPr>
               <a:r>
-                <a:rPr lang="en-US" sz="1600" b="1" dirty="0" err="1"/>
+                <a:rPr lang="en-US" sz="1600" b="1" dirty="0"/>
                 <a:t>FastAPI</a:t>
               </a:r>
-              <a:endParaRPr lang="en-US" sz="1600" b="1" dirty="0"/>
             </a:p>
           </p:txBody>
         </p:sp>
@@ -5001,10 +4998,9 @@
                 <a:buChar char="•"/>
               </a:pPr>
               <a:r>
-                <a:rPr lang="en-US" sz="1600" b="1" dirty="0" err="1"/>
+                <a:rPr lang="en-US" sz="1600" b="1" dirty="0"/>
                 <a:t>EasyOCR</a:t>
               </a:r>
-              <a:endParaRPr lang="en-US" sz="1600" b="1" dirty="0"/>
             </a:p>
             <a:p>
               <a:pPr marL="285750" indent="-285750">
